--- a/IT-Lingo.pptx
+++ b/IT-Lingo.pptx
@@ -309,7 +309,7 @@
           <a:p>
             <a:fld id="{5BCAD085-E8A6-8845-BD4E-CB4CCA059FC4}" type="datetimeFigureOut">
               <a:rPr lang="en-US" smtClean="0"/>
-              <a:t>3/28/2026</a:t>
+              <a:t>3/29/2026</a:t>
             </a:fld>
             <a:endParaRPr lang="en-US"/>
           </a:p>
@@ -477,7 +477,7 @@
           <a:p>
             <a:fld id="{5BCAD085-E8A6-8845-BD4E-CB4CCA059FC4}" type="datetimeFigureOut">
               <a:rPr lang="en-US" smtClean="0"/>
-              <a:t>3/28/2026</a:t>
+              <a:t>3/29/2026</a:t>
             </a:fld>
             <a:endParaRPr lang="en-US"/>
           </a:p>
@@ -655,7 +655,7 @@
           <a:p>
             <a:fld id="{5BCAD085-E8A6-8845-BD4E-CB4CCA059FC4}" type="datetimeFigureOut">
               <a:rPr lang="en-US" smtClean="0"/>
-              <a:t>3/28/2026</a:t>
+              <a:t>3/29/2026</a:t>
             </a:fld>
             <a:endParaRPr lang="en-US"/>
           </a:p>
@@ -823,7 +823,7 @@
           <a:p>
             <a:fld id="{5BCAD085-E8A6-8845-BD4E-CB4CCA059FC4}" type="datetimeFigureOut">
               <a:rPr lang="en-US" smtClean="0"/>
-              <a:t>3/28/2026</a:t>
+              <a:t>3/29/2026</a:t>
             </a:fld>
             <a:endParaRPr lang="en-US"/>
           </a:p>
@@ -1068,7 +1068,7 @@
           <a:p>
             <a:fld id="{5BCAD085-E8A6-8845-BD4E-CB4CCA059FC4}" type="datetimeFigureOut">
               <a:rPr lang="en-US" smtClean="0"/>
-              <a:t>3/28/2026</a:t>
+              <a:t>3/29/2026</a:t>
             </a:fld>
             <a:endParaRPr lang="en-US"/>
           </a:p>
@@ -1353,7 +1353,7 @@
           <a:p>
             <a:fld id="{5BCAD085-E8A6-8845-BD4E-CB4CCA059FC4}" type="datetimeFigureOut">
               <a:rPr lang="en-US" smtClean="0"/>
-              <a:t>3/28/2026</a:t>
+              <a:t>3/29/2026</a:t>
             </a:fld>
             <a:endParaRPr lang="en-US"/>
           </a:p>
@@ -1772,7 +1772,7 @@
           <a:p>
             <a:fld id="{5BCAD085-E8A6-8845-BD4E-CB4CCA059FC4}" type="datetimeFigureOut">
               <a:rPr lang="en-US" smtClean="0"/>
-              <a:t>3/28/2026</a:t>
+              <a:t>3/29/2026</a:t>
             </a:fld>
             <a:endParaRPr lang="en-US"/>
           </a:p>
@@ -1889,7 +1889,7 @@
           <a:p>
             <a:fld id="{5BCAD085-E8A6-8845-BD4E-CB4CCA059FC4}" type="datetimeFigureOut">
               <a:rPr lang="en-US" smtClean="0"/>
-              <a:t>3/28/2026</a:t>
+              <a:t>3/29/2026</a:t>
             </a:fld>
             <a:endParaRPr lang="en-US"/>
           </a:p>
@@ -1984,7 +1984,7 @@
           <a:p>
             <a:fld id="{5BCAD085-E8A6-8845-BD4E-CB4CCA059FC4}" type="datetimeFigureOut">
               <a:rPr lang="en-US" smtClean="0"/>
-              <a:t>3/28/2026</a:t>
+              <a:t>3/29/2026</a:t>
             </a:fld>
             <a:endParaRPr lang="en-US"/>
           </a:p>
@@ -2259,7 +2259,7 @@
           <a:p>
             <a:fld id="{5BCAD085-E8A6-8845-BD4E-CB4CCA059FC4}" type="datetimeFigureOut">
               <a:rPr lang="en-US" smtClean="0"/>
-              <a:t>3/28/2026</a:t>
+              <a:t>3/29/2026</a:t>
             </a:fld>
             <a:endParaRPr lang="en-US"/>
           </a:p>
@@ -2511,7 +2511,7 @@
           <a:p>
             <a:fld id="{5BCAD085-E8A6-8845-BD4E-CB4CCA059FC4}" type="datetimeFigureOut">
               <a:rPr lang="en-US" smtClean="0"/>
-              <a:t>3/28/2026</a:t>
+              <a:t>3/29/2026</a:t>
             </a:fld>
             <a:endParaRPr lang="en-US"/>
           </a:p>
@@ -2722,7 +2722,7 @@
           <a:p>
             <a:fld id="{5BCAD085-E8A6-8845-BD4E-CB4CCA059FC4}" type="datetimeFigureOut">
               <a:rPr lang="en-US" smtClean="0"/>
-              <a:t>3/28/2026</a:t>
+              <a:t>3/29/2026</a:t>
             </a:fld>
             <a:endParaRPr lang="en-US"/>
           </a:p>
@@ -4684,61 +4684,6 @@
       </p:sp>
       <p:sp>
         <p:nvSpPr>
-          <p:cNvPr id="18" name="Rectangle 17"/>
-          <p:cNvSpPr/>
-          <p:nvPr/>
-        </p:nvSpPr>
-        <p:spPr>
-          <a:xfrm>
-            <a:off x="7360920" y="1737360"/>
-            <a:ext cx="3840480" cy="3200400"/>
-          </a:xfrm>
-          <a:prstGeom prst="rect">
-            <a:avLst/>
-          </a:prstGeom>
-          <a:solidFill>
-            <a:srgbClr val="E7E6E6"/>
-          </a:solidFill>
-          <a:ln>
-            <a:solidFill>
-              <a:srgbClr val="5B9BD5"/>
-            </a:solidFill>
-          </a:ln>
-        </p:spPr>
-        <p:style>
-          <a:lnRef idx="1">
-            <a:schemeClr val="accent1"/>
-          </a:lnRef>
-          <a:fillRef idx="3">
-            <a:schemeClr val="accent1"/>
-          </a:fillRef>
-          <a:effectRef idx="2">
-            <a:schemeClr val="accent1"/>
-          </a:effectRef>
-          <a:fontRef idx="minor">
-            <a:schemeClr val="lt1"/>
-          </a:fontRef>
-        </p:style>
-        <p:txBody>
-          <a:bodyPr wrap="square" rtlCol="0" anchor="ctr"/>
-          <a:lstStyle/>
-          <a:p>
-            <a:pPr algn="ctr"/>
-            <a:r>
-              <a:rPr sz="1800" b="1">
-                <a:solidFill>
-                  <a:srgbClr val="44546A"/>
-                </a:solidFill>
-                <a:latin typeface="Arial" panose="020B0604020202020204" pitchFamily="34" charset="0"/>
-                <a:cs typeface="Arial" panose="020B0604020202020204" pitchFamily="34" charset="0"/>
-              </a:rPr>
-              <a:t>Добавьте фото команды</a:t>
-            </a:r>
-          </a:p>
-        </p:txBody>
-      </p:sp>
-      <p:sp>
-        <p:nvSpPr>
           <p:cNvPr id="19" name="TextBox 18"/>
           <p:cNvSpPr txBox="1"/>
           <p:nvPr/>
@@ -4842,6 +4787,36 @@
           </a:p>
         </p:txBody>
       </p:sp>
+      <p:pic>
+        <p:nvPicPr>
+          <p:cNvPr id="5" name="Рисунок 4">
+            <a:extLst>
+              <a:ext uri="{FF2B5EF4-FFF2-40B4-BE49-F238E27FC236}">
+                <a16:creationId xmlns:a16="http://schemas.microsoft.com/office/drawing/2014/main" id="{03EFB0E5-6B39-2E17-CF60-D1A5A4834E46}"/>
+              </a:ext>
+            </a:extLst>
+          </p:cNvPr>
+          <p:cNvPicPr>
+            <a:picLocks noChangeAspect="1"/>
+          </p:cNvPicPr>
+          <p:nvPr/>
+        </p:nvPicPr>
+        <p:blipFill>
+          <a:blip r:embed="rId2"/>
+          <a:stretch>
+            <a:fillRect/>
+          </a:stretch>
+        </p:blipFill>
+        <p:spPr>
+          <a:xfrm>
+            <a:off x="6683629" y="1237238"/>
+            <a:ext cx="5212080" cy="3909060"/>
+          </a:xfrm>
+          <a:prstGeom prst="rect">
+            <a:avLst/>
+          </a:prstGeom>
+        </p:spPr>
+      </p:pic>
     </p:spTree>
   </p:cSld>
   <p:clrMapOvr>
